--- a/docs/manual/Jualan-Pengeksport-Sistem-Jejak-GPL.pptx
+++ b/docs/manual/Jualan-Pengeksport-Sistem-Jejak-GPL.pptx
@@ -1791,7 +1791,7 @@
           <a:lstStyle/>
           <a:p>
             <a:r>
-              <a:t>GPL-QR-001130, hujung rantaian tembikai. Pemegang kod ini Kedai Contoh Runcit. Kad peruncit berada di tepi lajur.</a:t>
+              <a:t>GPL-QR-001130, hujung rantaian tembikai. Lima kad penuh: Pengeluar, Pengeksport, Pemborong, Pengimport, Peruncit.</a:t>
             </a:r>
           </a:p>
         </p:txBody>
